--- a/videos/deep-learning/002_transformers_part2/recreated_pptx/slide_012_recreated.pptx
+++ b/videos/deep-learning/002_transformers_part2/recreated_pptx/slide_012_recreated.pptx
@@ -989,7 +989,7 @@
               <a:buNone/>
             </a:pPr>
             <a:r>
-              <a:rPr lang="en-US" sz="2300" b="1" dirty="0">
+              <a:rPr lang="en-US" sz="2210" b="1" dirty="0">
                 <a:solidFill>
                   <a:srgbClr val="C00000"/>
                 </a:solidFill>
@@ -1003,7 +1003,7 @@
               <a:buNone/>
             </a:pPr>
             <a:r>
-              <a:rPr lang="en-US" sz="2300" b="1" u="sng" dirty="0">
+              <a:rPr lang="en-US" sz="2210" b="1" u="sng" dirty="0">
                 <a:solidFill>
                   <a:srgbClr val="C00000"/>
                 </a:solidFill>
@@ -1013,7 +1013,7 @@
               </a:rPr>
               <a:t>Multiple Matrices</a:t>
             </a:r>
-            <a:endParaRPr lang="en-US" sz="2300" dirty="0"/>
+            <a:endParaRPr lang="en-US" sz="2210" dirty="0"/>
           </a:p>
         </p:txBody>
       </p:sp>
@@ -1142,7 +1142,7 @@
         </p:nvSpPr>
         <p:spPr>
           <a:xfrm>
-            <a:off x="1277595" y="1682749"/>
+            <a:off x="1191716" y="1682749"/>
             <a:ext cx="1524000" cy="177800"/>
           </a:xfrm>
           <a:prstGeom prst="rect">
@@ -1159,7 +1159,7 @@
               <a:buNone/>
             </a:pPr>
             <a:r>
-              <a:rPr lang="en-US" sz="1050" b="1" dirty="0">
+              <a:rPr lang="en-US" sz="1000" b="1" dirty="0">
                 <a:solidFill>
                   <a:srgbClr val="C00000"/>
                 </a:solidFill>
@@ -1169,7 +1169,7 @@
               </a:rPr>
               <a:t>Embedding Vector of</a:t>
             </a:r>
-            <a:endParaRPr lang="en-US" sz="1050" dirty="0"/>
+            <a:endParaRPr lang="en-US" sz="1000" dirty="0"/>
           </a:p>
         </p:txBody>
       </p:sp>
@@ -1248,12 +1248,12 @@
         </p:nvSpPr>
         <p:spPr>
           <a:xfrm>
-            <a:off x="1114741" y="2099929"/>
-            <a:ext cx="1603592" cy="444500"/>
+            <a:off x="1114741" y="2113220"/>
+            <a:ext cx="1464864" cy="412750"/>
           </a:xfrm>
           <a:prstGeom prst="roundRect">
             <a:avLst>
-              <a:gd name="adj" fmla="val 16457"/>
+              <a:gd name="adj" fmla="val 17723"/>
             </a:avLst>
           </a:prstGeom>
           <a:solidFill>
@@ -1270,7 +1270,7 @@
         </p:nvSpPr>
         <p:spPr>
           <a:xfrm>
-            <a:off x="1220438" y="2139801"/>
+            <a:off x="1227044" y="2139801"/>
             <a:ext cx="330200" cy="330200"/>
           </a:xfrm>
           <a:prstGeom prst="ellipse">
@@ -1295,7 +1295,7 @@
         </p:nvSpPr>
         <p:spPr>
           <a:xfrm>
-            <a:off x="1220438" y="2139801"/>
+            <a:off x="1227044" y="2139801"/>
             <a:ext cx="330200" cy="330200"/>
           </a:xfrm>
           <a:prstGeom prst="rect">
@@ -1348,7 +1348,7 @@
         </p:nvSpPr>
         <p:spPr>
           <a:xfrm>
-            <a:off x="1643229" y="2139801"/>
+            <a:off x="1610199" y="2139801"/>
             <a:ext cx="330200" cy="330200"/>
           </a:xfrm>
           <a:prstGeom prst="ellipse">
@@ -1373,7 +1373,7 @@
         </p:nvSpPr>
         <p:spPr>
           <a:xfrm>
-            <a:off x="1643229" y="2139801"/>
+            <a:off x="1610199" y="2139801"/>
             <a:ext cx="330200" cy="330200"/>
           </a:xfrm>
           <a:prstGeom prst="rect">
@@ -1426,7 +1426,7 @@
         </p:nvSpPr>
         <p:spPr>
           <a:xfrm>
-            <a:off x="2072626" y="2139801"/>
+            <a:off x="1927292" y="2139801"/>
             <a:ext cx="330200" cy="330200"/>
           </a:xfrm>
           <a:prstGeom prst="ellipse">
@@ -1451,7 +1451,7 @@
         </p:nvSpPr>
         <p:spPr>
           <a:xfrm>
-            <a:off x="2072626" y="2139801"/>
+            <a:off x="1927292" y="2139801"/>
             <a:ext cx="330200" cy="330200"/>
           </a:xfrm>
           <a:prstGeom prst="rect">
@@ -1504,7 +1504,7 @@
         </p:nvSpPr>
         <p:spPr>
           <a:xfrm>
-            <a:off x="2502023" y="2139801"/>
+            <a:off x="2284021" y="2139801"/>
             <a:ext cx="330200" cy="330200"/>
           </a:xfrm>
           <a:prstGeom prst="ellipse">
@@ -1529,7 +1529,7 @@
         </p:nvSpPr>
         <p:spPr>
           <a:xfrm>
-            <a:off x="2502023" y="2139801"/>
+            <a:off x="2284021" y="2139801"/>
             <a:ext cx="330200" cy="330200"/>
           </a:xfrm>
           <a:prstGeom prst="rect">
@@ -6754,8 +6754,8 @@
         </p:nvSpPr>
         <p:spPr>
           <a:xfrm>
-            <a:off x="3164381" y="5183370"/>
-            <a:ext cx="1397000" cy="330200"/>
+            <a:off x="3133911" y="5166092"/>
+            <a:ext cx="1524000" cy="330200"/>
           </a:xfrm>
           <a:prstGeom prst="rect">
             <a:avLst/>
@@ -6769,12 +6769,12 @@
           <a:p>
             <a:pPr algn="ctr" indent="0" marL="0">
               <a:lnSpc>
-                <a:spcPts val="1300"/>
+                <a:spcPts val="1250"/>
               </a:lnSpc>
               <a:buNone/>
             </a:pPr>
             <a:r>
-              <a:rPr lang="en-US" sz="1050" b="1" dirty="0">
+              <a:rPr lang="en-US" sz="1130" b="1" dirty="0">
                 <a:solidFill>
                   <a:srgbClr val="C00000"/>
                 </a:solidFill>
@@ -6784,17 +6784,17 @@
               </a:rPr>
               <a:t>Corresponding</a:t>
             </a:r>
-            <a:endParaRPr lang="en-US" sz="1050" dirty="0"/>
+            <a:endParaRPr lang="en-US" sz="1130" dirty="0"/>
           </a:p>
           <a:p>
             <a:pPr algn="ctr" indent="0" marL="0">
               <a:lnSpc>
-                <a:spcPts val="1300"/>
+                <a:spcPts val="1250"/>
               </a:lnSpc>
               <a:buNone/>
             </a:pPr>
             <a:r>
-              <a:rPr lang="en-US" sz="1050" b="1" dirty="0">
+              <a:rPr lang="en-US" sz="1130" b="1" dirty="0">
                 <a:solidFill>
                   <a:srgbClr val="C00000"/>
                 </a:solidFill>
@@ -6804,7 +6804,7 @@
               </a:rPr>
               <a:t>Projection at Head 1</a:t>
             </a:r>
-            <a:endParaRPr lang="en-US" sz="1050" dirty="0"/>
+            <a:endParaRPr lang="en-US" sz="1130" dirty="0"/>
           </a:p>
         </p:txBody>
       </p:sp>
@@ -6816,8 +6816,8 @@
         </p:nvSpPr>
         <p:spPr>
           <a:xfrm>
-            <a:off x="5496336" y="5183370"/>
-            <a:ext cx="1397000" cy="330200"/>
+            <a:off x="5449351" y="5166092"/>
+            <a:ext cx="1524000" cy="330200"/>
           </a:xfrm>
           <a:prstGeom prst="rect">
             <a:avLst/>
@@ -6831,12 +6831,12 @@
           <a:p>
             <a:pPr algn="ctr" indent="0" marL="0">
               <a:lnSpc>
-                <a:spcPts val="1300"/>
+                <a:spcPts val="1250"/>
               </a:lnSpc>
               <a:buNone/>
             </a:pPr>
             <a:r>
-              <a:rPr lang="en-US" sz="1050" b="1" dirty="0">
+              <a:rPr lang="en-US" sz="1130" b="1" dirty="0">
                 <a:solidFill>
                   <a:srgbClr val="C00000"/>
                 </a:solidFill>
@@ -6846,17 +6846,17 @@
               </a:rPr>
               <a:t>Corresponding</a:t>
             </a:r>
-            <a:endParaRPr lang="en-US" sz="1050" dirty="0"/>
+            <a:endParaRPr lang="en-US" sz="1130" dirty="0"/>
           </a:p>
           <a:p>
             <a:pPr algn="ctr" indent="0" marL="0">
               <a:lnSpc>
-                <a:spcPts val="1300"/>
+                <a:spcPts val="1250"/>
               </a:lnSpc>
               <a:buNone/>
             </a:pPr>
             <a:r>
-              <a:rPr lang="en-US" sz="1050" b="1" dirty="0">
+              <a:rPr lang="en-US" sz="1130" b="1" dirty="0">
                 <a:solidFill>
                   <a:srgbClr val="C00000"/>
                 </a:solidFill>
@@ -6866,7 +6866,7 @@
               </a:rPr>
               <a:t>Projection at Head 2</a:t>
             </a:r>
-            <a:endParaRPr lang="en-US" sz="1050" dirty="0"/>
+            <a:endParaRPr lang="en-US" sz="1130" dirty="0"/>
           </a:p>
         </p:txBody>
       </p:sp>
@@ -6878,8 +6878,8 @@
         </p:nvSpPr>
         <p:spPr>
           <a:xfrm>
-            <a:off x="7735806" y="5183370"/>
-            <a:ext cx="1397000" cy="330200"/>
+            <a:off x="7678912" y="5166092"/>
+            <a:ext cx="1524000" cy="330200"/>
           </a:xfrm>
           <a:prstGeom prst="rect">
             <a:avLst/>
@@ -6893,12 +6893,12 @@
           <a:p>
             <a:pPr algn="ctr" indent="0" marL="0">
               <a:lnSpc>
-                <a:spcPts val="1300"/>
+                <a:spcPts val="1250"/>
               </a:lnSpc>
               <a:buNone/>
             </a:pPr>
             <a:r>
-              <a:rPr lang="en-US" sz="1050" b="1" dirty="0">
+              <a:rPr lang="en-US" sz="1130" b="1" dirty="0">
                 <a:solidFill>
                   <a:srgbClr val="C00000"/>
                 </a:solidFill>
@@ -6908,17 +6908,17 @@
               </a:rPr>
               <a:t>Corresponding</a:t>
             </a:r>
-            <a:endParaRPr lang="en-US" sz="1050" dirty="0"/>
+            <a:endParaRPr lang="en-US" sz="1130" dirty="0"/>
           </a:p>
           <a:p>
             <a:pPr algn="ctr" indent="0" marL="0">
               <a:lnSpc>
-                <a:spcPts val="1300"/>
+                <a:spcPts val="1250"/>
               </a:lnSpc>
               <a:buNone/>
             </a:pPr>
             <a:r>
-              <a:rPr lang="en-US" sz="1050" b="1" dirty="0">
+              <a:rPr lang="en-US" sz="1130" b="1" dirty="0">
                 <a:solidFill>
                   <a:srgbClr val="C00000"/>
                 </a:solidFill>
@@ -6928,7 +6928,7 @@
               </a:rPr>
               <a:t>Projection at Head 3</a:t>
             </a:r>
-            <a:endParaRPr lang="en-US" sz="1050" dirty="0"/>
+            <a:endParaRPr lang="en-US" sz="1130" dirty="0"/>
           </a:p>
         </p:txBody>
       </p:sp>
@@ -6940,24 +6940,24 @@
         </p:nvSpPr>
         <p:spPr>
           <a:xfrm>
-            <a:off x="3838045" y="5589769"/>
-            <a:ext cx="406400" cy="330200"/>
-          </a:xfrm>
-          <a:prstGeom prst="rect">
-            <a:avLst/>
-          </a:prstGeom>
-          <a:noFill/>
-          <a:ln/>
-        </p:spPr>
-        <p:txBody>
-          <a:bodyPr wrap="square" lIns="0" tIns="0" rIns="0" bIns="0" rtlCol="0" anchor="ctr"/>
-          <a:lstStyle/>
-          <a:p>
-            <a:pPr algn="ctr" indent="0" marL="0">
-              <a:buNone/>
-            </a:pPr>
-            <a:r>
-              <a:rPr lang="en-US" sz="1300" b="1" dirty="0">
+            <a:off x="3683032" y="5581943"/>
+            <a:ext cx="254000" cy="279400"/>
+          </a:xfrm>
+          <a:prstGeom prst="rect">
+            <a:avLst/>
+          </a:prstGeom>
+          <a:noFill/>
+          <a:ln/>
+        </p:spPr>
+        <p:txBody>
+          <a:bodyPr wrap="square" lIns="0" tIns="0" rIns="0" bIns="0" rtlCol="0" anchor="ctr"/>
+          <a:lstStyle/>
+          <a:p>
+            <a:pPr algn="ctr" indent="0" marL="0">
+              <a:buNone/>
+            </a:pPr>
+            <a:r>
+              <a:rPr lang="en-US" sz="2000" b="1" dirty="0">
                 <a:solidFill>
                   <a:srgbClr val="C00000"/>
                 </a:solidFill>
@@ -6967,11 +6967,75 @@
               </a:rPr>
               <a:t>y</a:t>
             </a:r>
-            <a:pPr algn="ctr" indent="0" marL="0">
-              <a:buNone/>
-            </a:pPr>
-            <a:r>
-              <a:rPr lang="en-US" sz="850" b="1" baseline="-40000" dirty="0">
+            <a:endParaRPr lang="en-US" sz="2000" dirty="0"/>
+          </a:p>
+        </p:txBody>
+      </p:sp>
+      <p:sp>
+        <p:nvSpPr>
+          <p:cNvPr id="153" name="Text 151"/>
+          <p:cNvSpPr/>
+          <p:nvPr/>
+        </p:nvSpPr>
+        <p:spPr>
+          <a:xfrm>
+            <a:off x="3853254" y="5699787"/>
+            <a:ext cx="177800" cy="203200"/>
+          </a:xfrm>
+          <a:prstGeom prst="rect">
+            <a:avLst/>
+          </a:prstGeom>
+          <a:noFill/>
+          <a:ln/>
+        </p:spPr>
+        <p:txBody>
+          <a:bodyPr wrap="square" lIns="0" tIns="0" rIns="0" bIns="0" rtlCol="0" anchor="ctr"/>
+          <a:lstStyle/>
+          <a:p>
+            <a:pPr algn="ctr" indent="0" marL="0">
+              <a:buNone/>
+            </a:pPr>
+            <a:r>
+              <a:rPr lang="en-US" sz="1350" b="1" dirty="0">
+                <a:solidFill>
+                  <a:srgbClr val="C00000"/>
+                </a:solidFill>
+                <a:latin typeface="Arial" pitchFamily="34" charset="0"/>
+                <a:ea typeface="Arial" pitchFamily="34" charset="-122"/>
+                <a:cs typeface="Arial" pitchFamily="34" charset="-120"/>
+              </a:rPr>
+              <a:t>2</a:t>
+            </a:r>
+            <a:endParaRPr lang="en-US" sz="1350" dirty="0"/>
+          </a:p>
+        </p:txBody>
+      </p:sp>
+      <p:sp>
+        <p:nvSpPr>
+          <p:cNvPr id="154" name="Text 152"/>
+          <p:cNvSpPr/>
+          <p:nvPr/>
+        </p:nvSpPr>
+        <p:spPr>
+          <a:xfrm>
+            <a:off x="3934576" y="5620043"/>
+            <a:ext cx="279400" cy="203200"/>
+          </a:xfrm>
+          <a:prstGeom prst="rect">
+            <a:avLst/>
+          </a:prstGeom>
+          <a:noFill/>
+          <a:ln/>
+        </p:spPr>
+        <p:txBody>
+          <a:bodyPr wrap="square" lIns="0" tIns="0" rIns="0" bIns="0" rtlCol="0" anchor="ctr"/>
+          <a:lstStyle/>
+          <a:p>
+            <a:pPr algn="ctr" indent="0" marL="0">
+              <a:buNone/>
+            </a:pPr>
+            <a:r>
+              <a:rPr lang="en-US" sz="1100" b="1" dirty="0">
                 <a:solidFill>
                   <a:srgbClr val="1F3EC8"/>
                 </a:solidFill>
@@ -6979,13 +7043,116 @@
                 <a:ea typeface="Arial" pitchFamily="34" charset="-122"/>
                 <a:cs typeface="Arial" pitchFamily="34" charset="-120"/>
               </a:rPr>
+              <a:t>(1)</a:t>
+            </a:r>
+            <a:endParaRPr lang="en-US" sz="1100" dirty="0"/>
+          </a:p>
+        </p:txBody>
+      </p:sp>
+      <p:sp>
+        <p:nvSpPr>
+          <p:cNvPr id="155" name="Text 153"/>
+          <p:cNvSpPr/>
+          <p:nvPr/>
+        </p:nvSpPr>
+        <p:spPr>
+          <a:xfrm>
+            <a:off x="6008381" y="5581943"/>
+            <a:ext cx="254000" cy="279400"/>
+          </a:xfrm>
+          <a:prstGeom prst="rect">
+            <a:avLst/>
+          </a:prstGeom>
+          <a:noFill/>
+          <a:ln/>
+        </p:spPr>
+        <p:txBody>
+          <a:bodyPr wrap="square" lIns="0" tIns="0" rIns="0" bIns="0" rtlCol="0" anchor="ctr"/>
+          <a:lstStyle/>
+          <a:p>
+            <a:pPr algn="ctr" indent="0" marL="0">
+              <a:buNone/>
+            </a:pPr>
+            <a:r>
+              <a:rPr lang="en-US" sz="2000" b="1" dirty="0">
+                <a:solidFill>
+                  <a:srgbClr val="C00000"/>
+                </a:solidFill>
+                <a:latin typeface="Arial" pitchFamily="34" charset="0"/>
+                <a:ea typeface="Arial" pitchFamily="34" charset="-122"/>
+                <a:cs typeface="Arial" pitchFamily="34" charset="-120"/>
+              </a:rPr>
+              <a:t>y</a:t>
+            </a:r>
+            <a:endParaRPr lang="en-US" sz="2000" dirty="0"/>
+          </a:p>
+        </p:txBody>
+      </p:sp>
+      <p:sp>
+        <p:nvSpPr>
+          <p:cNvPr id="156" name="Text 154"/>
+          <p:cNvSpPr/>
+          <p:nvPr/>
+        </p:nvSpPr>
+        <p:spPr>
+          <a:xfrm>
+            <a:off x="6165391" y="5699787"/>
+            <a:ext cx="177800" cy="203200"/>
+          </a:xfrm>
+          <a:prstGeom prst="rect">
+            <a:avLst/>
+          </a:prstGeom>
+          <a:noFill/>
+          <a:ln/>
+        </p:spPr>
+        <p:txBody>
+          <a:bodyPr wrap="square" lIns="0" tIns="0" rIns="0" bIns="0" rtlCol="0" anchor="ctr"/>
+          <a:lstStyle/>
+          <a:p>
+            <a:pPr algn="ctr" indent="0" marL="0">
+              <a:buNone/>
+            </a:pPr>
+            <a:r>
+              <a:rPr lang="en-US" sz="1350" b="1" dirty="0">
+                <a:solidFill>
+                  <a:srgbClr val="C00000"/>
+                </a:solidFill>
+                <a:latin typeface="Arial" pitchFamily="34" charset="0"/>
+                <a:ea typeface="Arial" pitchFamily="34" charset="-122"/>
+                <a:cs typeface="Arial" pitchFamily="34" charset="-120"/>
+              </a:rPr>
               <a:t>2</a:t>
             </a:r>
-            <a:pPr algn="ctr" indent="0" marL="0">
-              <a:buNone/>
-            </a:pPr>
-            <a:r>
-              <a:rPr lang="en-US" sz="850" b="1" baseline="30000" dirty="0">
+            <a:endParaRPr lang="en-US" sz="1350" dirty="0"/>
+          </a:p>
+        </p:txBody>
+      </p:sp>
+      <p:sp>
+        <p:nvSpPr>
+          <p:cNvPr id="157" name="Text 155"/>
+          <p:cNvSpPr/>
+          <p:nvPr/>
+        </p:nvSpPr>
+        <p:spPr>
+          <a:xfrm>
+            <a:off x="6240107" y="5620043"/>
+            <a:ext cx="279400" cy="203200"/>
+          </a:xfrm>
+          <a:prstGeom prst="rect">
+            <a:avLst/>
+          </a:prstGeom>
+          <a:noFill/>
+          <a:ln/>
+        </p:spPr>
+        <p:txBody>
+          <a:bodyPr wrap="square" lIns="0" tIns="0" rIns="0" bIns="0" rtlCol="0" anchor="ctr"/>
+          <a:lstStyle/>
+          <a:p>
+            <a:pPr algn="ctr" indent="0" marL="0">
+              <a:buNone/>
+            </a:pPr>
+            <a:r>
+              <a:rPr lang="en-US" sz="1100" b="1" dirty="0">
                 <a:solidFill>
                   <a:srgbClr val="1F3EC8"/>
                 </a:solidFill>
@@ -6993,38 +7160,38 @@
                 <a:ea typeface="Arial" pitchFamily="34" charset="-122"/>
                 <a:cs typeface="Arial" pitchFamily="34" charset="-120"/>
               </a:rPr>
-              <a:t>(1)</a:t>
-            </a:r>
-            <a:endParaRPr lang="en-US" sz="1300" dirty="0"/>
-          </a:p>
-        </p:txBody>
-      </p:sp>
-      <p:sp>
-        <p:nvSpPr>
-          <p:cNvPr id="153" name="Text 151"/>
-          <p:cNvSpPr/>
-          <p:nvPr/>
-        </p:nvSpPr>
-        <p:spPr>
-          <a:xfrm>
-            <a:off x="6136970" y="5589769"/>
-            <a:ext cx="406400" cy="330200"/>
-          </a:xfrm>
-          <a:prstGeom prst="rect">
-            <a:avLst/>
-          </a:prstGeom>
-          <a:noFill/>
-          <a:ln/>
-        </p:spPr>
-        <p:txBody>
-          <a:bodyPr wrap="square" lIns="0" tIns="0" rIns="0" bIns="0" rtlCol="0" anchor="ctr"/>
-          <a:lstStyle/>
-          <a:p>
-            <a:pPr algn="ctr" indent="0" marL="0">
-              <a:buNone/>
-            </a:pPr>
-            <a:r>
-              <a:rPr lang="en-US" sz="1300" b="1" dirty="0">
+              <a:t>(2)</a:t>
+            </a:r>
+            <a:endParaRPr lang="en-US" sz="1100" dirty="0"/>
+          </a:p>
+        </p:txBody>
+      </p:sp>
+      <p:sp>
+        <p:nvSpPr>
+          <p:cNvPr id="158" name="Text 156"/>
+          <p:cNvSpPr/>
+          <p:nvPr/>
+        </p:nvSpPr>
+        <p:spPr>
+          <a:xfrm>
+            <a:off x="8228032" y="5581943"/>
+            <a:ext cx="254000" cy="279400"/>
+          </a:xfrm>
+          <a:prstGeom prst="rect">
+            <a:avLst/>
+          </a:prstGeom>
+          <a:noFill/>
+          <a:ln/>
+        </p:spPr>
+        <p:txBody>
+          <a:bodyPr wrap="square" lIns="0" tIns="0" rIns="0" bIns="0" rtlCol="0" anchor="ctr"/>
+          <a:lstStyle/>
+          <a:p>
+            <a:pPr algn="ctr" indent="0" marL="0">
+              <a:buNone/>
+            </a:pPr>
+            <a:r>
+              <a:rPr lang="en-US" sz="2000" b="1" dirty="0">
                 <a:solidFill>
                   <a:srgbClr val="C00000"/>
                 </a:solidFill>
@@ -7034,11 +7201,75 @@
               </a:rPr>
               <a:t>y</a:t>
             </a:r>
-            <a:pPr algn="ctr" indent="0" marL="0">
-              <a:buNone/>
-            </a:pPr>
-            <a:r>
-              <a:rPr lang="en-US" sz="850" b="1" baseline="-40000" dirty="0">
+            <a:endParaRPr lang="en-US" sz="2000" dirty="0"/>
+          </a:p>
+        </p:txBody>
+      </p:sp>
+      <p:sp>
+        <p:nvSpPr>
+          <p:cNvPr id="159" name="Text 157"/>
+          <p:cNvSpPr/>
+          <p:nvPr/>
+        </p:nvSpPr>
+        <p:spPr>
+          <a:xfrm>
+            <a:off x="8391648" y="5699787"/>
+            <a:ext cx="177800" cy="203200"/>
+          </a:xfrm>
+          <a:prstGeom prst="rect">
+            <a:avLst/>
+          </a:prstGeom>
+          <a:noFill/>
+          <a:ln/>
+        </p:spPr>
+        <p:txBody>
+          <a:bodyPr wrap="square" lIns="0" tIns="0" rIns="0" bIns="0" rtlCol="0" anchor="ctr"/>
+          <a:lstStyle/>
+          <a:p>
+            <a:pPr algn="ctr" indent="0" marL="0">
+              <a:buNone/>
+            </a:pPr>
+            <a:r>
+              <a:rPr lang="en-US" sz="1350" b="1" dirty="0">
+                <a:solidFill>
+                  <a:srgbClr val="C00000"/>
+                </a:solidFill>
+                <a:latin typeface="Arial" pitchFamily="34" charset="0"/>
+                <a:ea typeface="Arial" pitchFamily="34" charset="-122"/>
+                <a:cs typeface="Arial" pitchFamily="34" charset="-120"/>
+              </a:rPr>
+              <a:t>2</a:t>
+            </a:r>
+            <a:endParaRPr lang="en-US" sz="1350" dirty="0"/>
+          </a:p>
+        </p:txBody>
+      </p:sp>
+      <p:sp>
+        <p:nvSpPr>
+          <p:cNvPr id="160" name="Text 158"/>
+          <p:cNvSpPr/>
+          <p:nvPr/>
+        </p:nvSpPr>
+        <p:spPr>
+          <a:xfrm>
+            <a:off x="8479577" y="5620043"/>
+            <a:ext cx="279400" cy="203200"/>
+          </a:xfrm>
+          <a:prstGeom prst="rect">
+            <a:avLst/>
+          </a:prstGeom>
+          <a:noFill/>
+          <a:ln/>
+        </p:spPr>
+        <p:txBody>
+          <a:bodyPr wrap="square" lIns="0" tIns="0" rIns="0" bIns="0" rtlCol="0" anchor="ctr"/>
+          <a:lstStyle/>
+          <a:p>
+            <a:pPr algn="ctr" indent="0" marL="0">
+              <a:buNone/>
+            </a:pPr>
+            <a:r>
+              <a:rPr lang="en-US" sz="1100" b="1" dirty="0">
                 <a:solidFill>
                   <a:srgbClr val="1F3EC8"/>
                 </a:solidFill>
@@ -7046,96 +7277,15 @@
                 <a:ea typeface="Arial" pitchFamily="34" charset="-122"/>
                 <a:cs typeface="Arial" pitchFamily="34" charset="-120"/>
               </a:rPr>
-              <a:t>2</a:t>
-            </a:r>
-            <a:pPr algn="ctr" indent="0" marL="0">
-              <a:buNone/>
-            </a:pPr>
-            <a:r>
-              <a:rPr lang="en-US" sz="850" b="1" baseline="30000" dirty="0">
-                <a:solidFill>
-                  <a:srgbClr val="1F3EC8"/>
-                </a:solidFill>
-                <a:latin typeface="Arial" pitchFamily="34" charset="0"/>
-                <a:ea typeface="Arial" pitchFamily="34" charset="-122"/>
-                <a:cs typeface="Arial" pitchFamily="34" charset="-120"/>
-              </a:rPr>
-              <a:t>(2)</a:t>
-            </a:r>
-            <a:endParaRPr lang="en-US" sz="1300" dirty="0"/>
-          </a:p>
-        </p:txBody>
-      </p:sp>
-      <p:sp>
-        <p:nvSpPr>
-          <p:cNvPr id="154" name="Text 152"/>
-          <p:cNvSpPr/>
-          <p:nvPr/>
-        </p:nvSpPr>
-        <p:spPr>
-          <a:xfrm>
-            <a:off x="8383046" y="5589769"/>
-            <a:ext cx="406400" cy="330200"/>
-          </a:xfrm>
-          <a:prstGeom prst="rect">
-            <a:avLst/>
-          </a:prstGeom>
-          <a:noFill/>
-          <a:ln/>
-        </p:spPr>
-        <p:txBody>
-          <a:bodyPr wrap="square" lIns="0" tIns="0" rIns="0" bIns="0" rtlCol="0" anchor="ctr"/>
-          <a:lstStyle/>
-          <a:p>
-            <a:pPr algn="ctr" indent="0" marL="0">
-              <a:buNone/>
-            </a:pPr>
-            <a:r>
-              <a:rPr lang="en-US" sz="1300" b="1" dirty="0">
-                <a:solidFill>
-                  <a:srgbClr val="C00000"/>
-                </a:solidFill>
-                <a:latin typeface="Arial" pitchFamily="34" charset="0"/>
-                <a:ea typeface="Arial" pitchFamily="34" charset="-122"/>
-                <a:cs typeface="Arial" pitchFamily="34" charset="-120"/>
-              </a:rPr>
-              <a:t>y</a:t>
-            </a:r>
-            <a:pPr algn="ctr" indent="0" marL="0">
-              <a:buNone/>
-            </a:pPr>
-            <a:r>
-              <a:rPr lang="en-US" sz="850" b="1" baseline="-40000" dirty="0">
-                <a:solidFill>
-                  <a:srgbClr val="1F3EC8"/>
-                </a:solidFill>
-                <a:latin typeface="Arial" pitchFamily="34" charset="0"/>
-                <a:ea typeface="Arial" pitchFamily="34" charset="-122"/>
-                <a:cs typeface="Arial" pitchFamily="34" charset="-120"/>
-              </a:rPr>
-              <a:t>2</a:t>
-            </a:r>
-            <a:pPr algn="ctr" indent="0" marL="0">
-              <a:buNone/>
-            </a:pPr>
-            <a:r>
-              <a:rPr lang="en-US" sz="850" b="1" baseline="30000" dirty="0">
-                <a:solidFill>
-                  <a:srgbClr val="1F3EC8"/>
-                </a:solidFill>
-                <a:latin typeface="Arial" pitchFamily="34" charset="0"/>
-                <a:ea typeface="Arial" pitchFamily="34" charset="-122"/>
-                <a:cs typeface="Arial" pitchFamily="34" charset="-120"/>
-              </a:rPr>
               <a:t>(3)</a:t>
             </a:r>
-            <a:endParaRPr lang="en-US" sz="1300" dirty="0"/>
-          </a:p>
-        </p:txBody>
-      </p:sp>
-      <p:sp>
-        <p:nvSpPr>
-          <p:cNvPr id="155" name="Shape 153"/>
+            <a:endParaRPr lang="en-US" sz="1100" dirty="0"/>
+          </a:p>
+        </p:txBody>
+      </p:sp>
+      <p:sp>
+        <p:nvSpPr>
+          <p:cNvPr id="161" name="Shape 159"/>
           <p:cNvSpPr/>
           <p:nvPr/>
         </p:nvSpPr>
@@ -7159,7 +7309,7 @@
       </p:sp>
       <p:sp>
         <p:nvSpPr>
-          <p:cNvPr id="156" name="Text 154"/>
+          <p:cNvPr id="162" name="Text 160"/>
           <p:cNvSpPr/>
           <p:nvPr/>
         </p:nvSpPr>
@@ -7212,7 +7362,7 @@
       </p:sp>
       <p:pic>
         <p:nvPicPr>
-          <p:cNvPr id="157" name="Image 0" descr="/home/ahmed/Projects/ai_llm_slides/videos/deep-learning/002_transformers_part2/recreated_pptx/build/assets/s012_brace_tall_L.png">    </p:cNvPr>
+          <p:cNvPr id="163" name="Image 0" descr="/home/ahmed/Projects/ai_llm_slides/videos/deep-learning/002_transformers_part2/recreated_pptx/build/assets/s012_brace_tall_L.png">    </p:cNvPr>
           <p:cNvPicPr>
             <a:picLocks noChangeAspect="1"/>
           </p:cNvPicPr>
@@ -7236,7 +7386,7 @@
       </p:pic>
       <p:pic>
         <p:nvPicPr>
-          <p:cNvPr id="158" name="Image 1" descr="/home/ahmed/Projects/ai_llm_slides/videos/deep-learning/002_transformers_part2/recreated_pptx/build/assets/s012_brace_tall_R.png">    </p:cNvPr>
+          <p:cNvPr id="164" name="Image 1" descr="/home/ahmed/Projects/ai_llm_slides/videos/deep-learning/002_transformers_part2/recreated_pptx/build/assets/s012_brace_tall_R.png">    </p:cNvPr>
           <p:cNvPicPr>
             <a:picLocks noChangeAspect="1"/>
           </p:cNvPicPr>
@@ -7260,7 +7410,7 @@
       </p:pic>
       <p:pic>
         <p:nvPicPr>
-          <p:cNvPr id="159" name="Image 2" descr="/home/ahmed/Projects/ai_llm_slides/videos/deep-learning/002_transformers_part2/recreated_pptx/build/assets/s012_brace_short_L.png">    </p:cNvPr>
+          <p:cNvPr id="165" name="Image 2" descr="/home/ahmed/Projects/ai_llm_slides/videos/deep-learning/002_transformers_part2/recreated_pptx/build/assets/s012_brace_short_L.png">    </p:cNvPr>
           <p:cNvPicPr>
             <a:picLocks noChangeAspect="1"/>
           </p:cNvPicPr>
@@ -7274,8 +7424,8 @@
         </p:blipFill>
         <p:spPr>
           <a:xfrm>
-            <a:off x="2964450" y="4638451"/>
-            <a:ext cx="141732" cy="512064"/>
+            <a:off x="2964450" y="4665033"/>
+            <a:ext cx="99670" cy="485821"/>
           </a:xfrm>
           <a:prstGeom prst="rect">
             <a:avLst/>
@@ -7284,7 +7434,7 @@
       </p:pic>
       <p:pic>
         <p:nvPicPr>
-          <p:cNvPr id="160" name="Image 3" descr="/home/ahmed/Projects/ai_llm_slides/videos/deep-learning/002_transformers_part2/recreated_pptx/build/assets/s012_brace_short_R.png">    </p:cNvPr>
+          <p:cNvPr id="166" name="Image 3" descr="/home/ahmed/Projects/ai_llm_slides/videos/deep-learning/002_transformers_part2/recreated_pptx/build/assets/s012_brace_short_R.png">    </p:cNvPr>
           <p:cNvPicPr>
             <a:picLocks noChangeAspect="1"/>
           </p:cNvPicPr>
@@ -7298,8 +7448,8 @@
         </p:blipFill>
         <p:spPr>
           <a:xfrm>
-            <a:off x="9266675" y="4638451"/>
-            <a:ext cx="141732" cy="512064"/>
+            <a:off x="9306311" y="4665033"/>
+            <a:ext cx="87417" cy="485821"/>
           </a:xfrm>
           <a:prstGeom prst="rect">
             <a:avLst/>
